--- a/data-eng/decks/w3d4s2.pptx
+++ b/data-eng/decks/w3d4s2.pptx
@@ -3100,7 +3100,7 @@
       <p:grpSpPr/>
       <p:sp>
         <p:nvSpPr>
-          <p:cNvPr id="2" name="Oval 1"/>
+          <p:cNvPr id="2" name="deckgen:decor"/>
           <p:cNvSpPr/>
           <p:nvPr/>
         </p:nvSpPr>
@@ -3130,7 +3130,7 @@
       </p:sp>
       <p:sp>
         <p:nvSpPr>
-          <p:cNvPr id="3" name="Oval 2"/>
+          <p:cNvPr id="3" name="deckgen:decor"/>
           <p:cNvSpPr/>
           <p:nvPr/>
         </p:nvSpPr>
@@ -3160,7 +3160,7 @@
       </p:sp>
       <p:sp>
         <p:nvSpPr>
-          <p:cNvPr id="4" name="Oval 3"/>
+          <p:cNvPr id="4" name="deckgen:decor"/>
           <p:cNvSpPr/>
           <p:nvPr/>
         </p:nvSpPr>
@@ -3190,7 +3190,7 @@
       </p:sp>
       <p:sp>
         <p:nvSpPr>
-          <p:cNvPr id="5" name="Rectangle 4"/>
+          <p:cNvPr id="5" name="deckgen:decor"/>
           <p:cNvSpPr/>
           <p:nvPr/>
         </p:nvSpPr>
@@ -3220,7 +3220,7 @@
       </p:sp>
       <p:sp>
         <p:nvSpPr>
-          <p:cNvPr id="6" name="Oval 5"/>
+          <p:cNvPr id="6" name="deckgen:decor"/>
           <p:cNvSpPr/>
           <p:nvPr/>
         </p:nvSpPr>
@@ -3250,7 +3250,7 @@
       </p:sp>
       <p:sp>
         <p:nvSpPr>
-          <p:cNvPr id="7" name="Oval 6"/>
+          <p:cNvPr id="7" name="deckgen:decor"/>
           <p:cNvSpPr/>
           <p:nvPr/>
         </p:nvSpPr>
@@ -3280,7 +3280,7 @@
       </p:sp>
       <p:sp>
         <p:nvSpPr>
-          <p:cNvPr id="8" name="Oval 7"/>
+          <p:cNvPr id="8" name="deckgen:decor"/>
           <p:cNvSpPr/>
           <p:nvPr/>
         </p:nvSpPr>
@@ -3310,7 +3310,7 @@
       </p:sp>
       <p:sp>
         <p:nvSpPr>
-          <p:cNvPr id="9" name="Oval 8"/>
+          <p:cNvPr id="9" name="deckgen:decor"/>
           <p:cNvSpPr/>
           <p:nvPr/>
         </p:nvSpPr>
@@ -3340,7 +3340,7 @@
       </p:sp>
       <p:sp>
         <p:nvSpPr>
-          <p:cNvPr id="10" name="Rectangle 9"/>
+          <p:cNvPr id="10" name="deckgen:decor"/>
           <p:cNvSpPr/>
           <p:nvPr/>
         </p:nvSpPr>
@@ -3600,7 +3600,7 @@
       <p:grpSpPr/>
       <p:sp>
         <p:nvSpPr>
-          <p:cNvPr id="2" name="Oval 1"/>
+          <p:cNvPr id="2" name="deckgen:decor"/>
           <p:cNvSpPr/>
           <p:nvPr/>
         </p:nvSpPr>
@@ -3630,7 +3630,7 @@
       </p:sp>
       <p:sp>
         <p:nvSpPr>
-          <p:cNvPr id="3" name="Oval 2"/>
+          <p:cNvPr id="3" name="deckgen:decor"/>
           <p:cNvSpPr/>
           <p:nvPr/>
         </p:nvSpPr>
@@ -3660,7 +3660,7 @@
       </p:sp>
       <p:sp>
         <p:nvSpPr>
-          <p:cNvPr id="4" name="Oval 3"/>
+          <p:cNvPr id="4" name="deckgen:decor"/>
           <p:cNvSpPr/>
           <p:nvPr/>
         </p:nvSpPr>
@@ -3941,7 +3941,7 @@
                 <a:ea typeface="Pretendard"/>
                 <a:cs typeface="Pretendard"/>
               </a:rPr>
-              <a:t>1단계 5행이 spend 내림차순, 2단계 지역 4행</a:t>
+              <a:t>1위 12844 · 44700, 지역 4행(부산 77389000 이 1위)</a:t>
             </a:r>
           </a:p>
         </p:txBody>
@@ -4087,7 +4087,7 @@
                 <a:ea typeface="Pretendard"/>
                 <a:cs typeface="Pretendard"/>
               </a:rPr>
-              <a:t>merged 의 diff 가 전부 0 이다</a:t>
+              <a:t>merged 의 diff 가 네 지역 모두 0.0 이다</a:t>
             </a:r>
           </a:p>
         </p:txBody>
@@ -4233,7 +4233,7 @@
                 <a:ea typeface="Pretendard"/>
                 <a:cs typeface="Pretendard"/>
               </a:rPr>
-              <a:t>cum_revenue 가 매 행 revenue 를 더해 단조 증가한다</a:t>
+              <a:t>cum_revenue 가 4064300 부터 단조 증가한다</a:t>
             </a:r>
           </a:p>
         </p:txBody>
@@ -4379,7 +4379,7 @@
                 <a:ea typeface="Pretendard"/>
                 <a:cs typeface="Pretendard"/>
               </a:rPr>
-              <a:t>지역마다 rnk 1~3 고객 — QUALIFY 와 CTE 결과가 같다</a:t>
+              <a:t>WHERE rnk 는 Binder Error, QUALIFY·CTE 는 12행</a:t>
             </a:r>
           </a:p>
         </p:txBody>
@@ -4662,7 +4662,7 @@
       <p:grpSpPr/>
       <p:sp>
         <p:nvSpPr>
-          <p:cNvPr id="2" name="Oval 1"/>
+          <p:cNvPr id="2" name="deckgen:decor"/>
           <p:cNvSpPr/>
           <p:nvPr/>
         </p:nvSpPr>
@@ -4692,7 +4692,7 @@
       </p:sp>
       <p:sp>
         <p:nvSpPr>
-          <p:cNvPr id="3" name="Oval 2"/>
+          <p:cNvPr id="3" name="deckgen:decor"/>
           <p:cNvSpPr/>
           <p:nvPr/>
         </p:nvSpPr>
@@ -4868,7 +4868,7 @@
                 <a:ea typeface="Pretendard"/>
                 <a:cs typeface="Pretendard"/>
               </a:rPr>
-              <a:t>SQL 로 줄이고 DataFrame 으로 받아 등급을 매기고, 다시 SQL 로 질의하는 왕복을 이어 갑니다</a:t>
+              <a:t>SQL 로 줄이고 DataFrame 으로 받아 등급을 매기고, 다시 SQL 로 질의하는 왕복을 roundtrip.py 에 이어 갑니다</a:t>
             </a:r>
           </a:p>
         </p:txBody>
@@ -4984,7 +4984,7 @@
                 <a:ea typeface="Pretendard"/>
                 <a:cs typeface="Pretendard"/>
               </a:rPr>
-              <a:t>LIMIT 100 결과를 .df() 로 받아 pd.cut</a:t>
+              <a:t>눈대중 경계로 일부러 실패 → 분위수 경계</a:t>
             </a:r>
           </a:p>
         </p:txBody>
@@ -5403,7 +5403,7 @@
                 <a:ea typeface="Pretendard"/>
                 <a:cs typeface="Pretendard"/>
               </a:rPr>
-              <a:t>가져갈 것</a:t>
+              <a:t>켜 둘 것</a:t>
             </a:r>
           </a:p>
         </p:txBody>
@@ -5444,7 +5444,7 @@
                 <a:ea typeface="Pretendard"/>
                 <a:cs typeface="Pretendard"/>
               </a:rPr>
-              <a:t>events.parquet 와 열린 파이썬 세션</a:t>
+              <a:t>(.venv) 터미널 · events.parquet</a:t>
             </a:r>
           </a:p>
         </p:txBody>
@@ -5469,7 +5469,7 @@
       <p:grpSpPr/>
       <p:sp>
         <p:nvSpPr>
-          <p:cNvPr id="2" name="Oval 1"/>
+          <p:cNvPr id="2" name="deckgen:decor"/>
           <p:cNvSpPr/>
           <p:nvPr/>
         </p:nvSpPr>
@@ -5499,7 +5499,7 @@
       </p:sp>
       <p:sp>
         <p:nvSpPr>
-          <p:cNvPr id="3" name="Oval 2"/>
+          <p:cNvPr id="3" name="deckgen:decor"/>
           <p:cNvSpPr/>
           <p:nvPr/>
         </p:nvSpPr>
@@ -5529,7 +5529,7 @@
       </p:sp>
       <p:sp>
         <p:nvSpPr>
-          <p:cNvPr id="4" name="Oval 3"/>
+          <p:cNvPr id="4" name="deckgen:decor"/>
           <p:cNvSpPr/>
           <p:nvPr/>
         </p:nvSpPr>
@@ -6248,7 +6248,7 @@
                 <a:ea typeface="Pretendard"/>
                 <a:cs typeface="Pretendard"/>
               </a:rPr>
-              <a:t>PARTITION BY + QUALIFY 로 지역별 상위 3명을 뽑는다</a:t>
+              <a:t>WHERE 로 순위를 거르다 실패하고, QUALIFY·CTE 로 고친다</a:t>
             </a:r>
           </a:p>
         </p:txBody>
@@ -6323,7 +6323,7 @@
                 <a:ea typeface="Pretendard"/>
                 <a:cs typeface="Pretendard"/>
               </a:rPr>
-              <a:t>일곱 단계 모두 duckdb.sql(""" … """) 한 호출씩 — 확인 포인트를 지나며 진행합니다</a:t>
+              <a:t>1~7단계를 sql_analysis.py 한 파일에 이어 붙여 단계마다 다시 돌립니다</a:t>
             </a:r>
           </a:p>
         </p:txBody>
@@ -6460,7 +6460,7 @@
       <p:grpSpPr/>
       <p:sp>
         <p:nvSpPr>
-          <p:cNvPr id="2" name="Oval 1"/>
+          <p:cNvPr id="2" name="deckgen:decor"/>
           <p:cNvSpPr/>
           <p:nvPr/>
         </p:nvSpPr>
@@ -6490,7 +6490,7 @@
       </p:sp>
       <p:sp>
         <p:nvSpPr>
-          <p:cNvPr id="3" name="Oval 2"/>
+          <p:cNvPr id="3" name="deckgen:decor"/>
           <p:cNvSpPr/>
           <p:nvPr/>
         </p:nvSpPr>
@@ -6520,7 +6520,7 @@
       </p:sp>
       <p:sp>
         <p:nvSpPr>
-          <p:cNvPr id="4" name="Oval 3"/>
+          <p:cNvPr id="4" name="deckgen:decor"/>
           <p:cNvSpPr/>
           <p:nvPr/>
         </p:nvSpPr>
@@ -6625,7 +6625,7 @@
                 <a:ea typeface="Pretendard"/>
                 <a:cs typeface="Pretendard"/>
               </a:rPr>
-              <a:t>일곱 단계 — 파일 세 개가 있는 폴더에서</a:t>
+              <a:t>일곱 단계 — 파일 넷이 있는 폴더에서</a:t>
             </a:r>
           </a:p>
         </p:txBody>
@@ -6696,7 +6696,7 @@
                 <a:ea typeface="Pretendard"/>
                 <a:cs typeface="Pretendard"/>
               </a:rPr>
-              <a:t>3-3 의 events.parquet, 3-1 의 orders_step1.parquet, 3-2 의 customers.csv 가 작업 폴더에 있어야 합니다</a:t>
+              <a:t>블록을 파일 끝에 붙이고 python3 sql_analysis.py — 앞 단계 출력이 함께 나오는 것이 정상</a:t>
             </a:r>
           </a:p>
         </p:txBody>
@@ -7188,7 +7188,7 @@
                 <a:ea typeface="Pretendard"/>
                 <a:cs typeface="Pretendard"/>
               </a:rPr>
-              <a:t>diff = 0</a:t>
+              <a:t>diff = 0.0</a:t>
             </a:r>
           </a:p>
         </p:txBody>
@@ -7653,7 +7653,7 @@
       <p:grpSpPr/>
       <p:sp>
         <p:nvSpPr>
-          <p:cNvPr id="2" name="Oval 1"/>
+          <p:cNvPr id="2" name="deckgen:decor"/>
           <p:cNvSpPr/>
           <p:nvPr/>
         </p:nvSpPr>
@@ -7683,7 +7683,7 @@
       </p:sp>
       <p:sp>
         <p:nvSpPr>
-          <p:cNvPr id="3" name="Oval 2"/>
+          <p:cNvPr id="3" name="deckgen:decor"/>
           <p:cNvSpPr/>
           <p:nvPr/>
         </p:nvSpPr>
@@ -7713,7 +7713,7 @@
       </p:sp>
       <p:sp>
         <p:nvSpPr>
-          <p:cNvPr id="4" name="Oval 3"/>
+          <p:cNvPr id="4" name="deckgen:decor"/>
           <p:cNvSpPr/>
           <p:nvPr/>
         </p:nvSpPr>
@@ -7818,7 +7818,7 @@
                 <a:ea typeface="Pretendard"/>
                 <a:cs typeface="Pretendard"/>
               </a:rPr>
-              <a:t>핵심 질의 — 상위 지출 사용자와 파일 JOIN</a:t>
+              <a:t>상위 지출 사용자와 파일 JOIN — 확인 수치</a:t>
             </a:r>
           </a:p>
         </p:txBody>
@@ -7862,7 +7862,7 @@
         <p:spPr>
           <a:xfrm>
             <a:off x="1143000" y="2781300"/>
-            <a:ext cx="1383387" cy="571500"/>
+            <a:ext cx="1325344" cy="571500"/>
           </a:xfrm>
           <a:prstGeom prst="rect">
             <a:avLst/>
@@ -7892,7 +7892,7 @@
         <p:spPr>
           <a:xfrm>
             <a:off x="1143000" y="2781300"/>
-            <a:ext cx="1383387" cy="571500"/>
+            <a:ext cx="1325344" cy="571500"/>
           </a:xfrm>
           <a:prstGeom prst="rect">
             <a:avLst/>
@@ -7919,7 +7919,7 @@
                 <a:ea typeface="Pretendard"/>
                 <a:cs typeface="Pretendard"/>
               </a:rPr>
-              <a:t>행 거르기</a:t>
+              <a:t>1단계 질의</a:t>
             </a:r>
           </a:p>
         </p:txBody>
@@ -7932,8 +7932,8 @@
         </p:nvSpPr>
         <p:spPr>
           <a:xfrm>
-            <a:off x="2526387" y="2781300"/>
-            <a:ext cx="14618613" cy="571500"/>
+            <a:off x="2468344" y="2781300"/>
+            <a:ext cx="14676656" cy="571500"/>
           </a:xfrm>
           <a:prstGeom prst="rect">
             <a:avLst/>
@@ -7964,8 +7964,8 @@
         </p:nvSpPr>
         <p:spPr>
           <a:xfrm>
-            <a:off x="2678787" y="2781300"/>
-            <a:ext cx="14313813" cy="571500"/>
+            <a:off x="2620744" y="2781300"/>
+            <a:ext cx="14371856" cy="571500"/>
           </a:xfrm>
           <a:prstGeom prst="rect">
             <a:avLst/>
@@ -7992,7 +7992,7 @@
                 <a:ea typeface="Pretendard"/>
                 <a:cs typeface="Pretendard"/>
               </a:rPr>
-              <a:t>WHERE event_type = 'buy'</a:t>
+              <a:t>WHERE event_type = 'buy' · GROUP BY user_id · ORDER BY spend DESC LIMIT 5</a:t>
             </a:r>
           </a:p>
         </p:txBody>
@@ -8006,7 +8006,7 @@
         <p:spPr>
           <a:xfrm>
             <a:off x="1143000" y="3429000"/>
-            <a:ext cx="1383387" cy="571500"/>
+            <a:ext cx="1325344" cy="571500"/>
           </a:xfrm>
           <a:prstGeom prst="rect">
             <a:avLst/>
@@ -8036,7 +8036,7 @@
         <p:spPr>
           <a:xfrm>
             <a:off x="1143000" y="3429000"/>
-            <a:ext cx="1383387" cy="571500"/>
+            <a:ext cx="1325344" cy="571500"/>
           </a:xfrm>
           <a:prstGeom prst="rect">
             <a:avLst/>
@@ -8063,7 +8063,7 @@
                 <a:ea typeface="Pretendard"/>
                 <a:cs typeface="Pretendard"/>
               </a:rPr>
-              <a:t>묶기</a:t>
+              <a:t>1단계 확인</a:t>
             </a:r>
           </a:p>
         </p:txBody>
@@ -8076,8 +8076,8 @@
         </p:nvSpPr>
         <p:spPr>
           <a:xfrm>
-            <a:off x="2526387" y="3429000"/>
-            <a:ext cx="14618613" cy="571500"/>
+            <a:off x="2468344" y="3429000"/>
+            <a:ext cx="14676656" cy="571500"/>
           </a:xfrm>
           <a:prstGeom prst="rect">
             <a:avLst/>
@@ -8108,8 +8108,8 @@
         </p:nvSpPr>
         <p:spPr>
           <a:xfrm>
-            <a:off x="2678787" y="3429000"/>
-            <a:ext cx="14313813" cy="571500"/>
+            <a:off x="2620744" y="3429000"/>
+            <a:ext cx="14371856" cy="571500"/>
           </a:xfrm>
           <a:prstGeom prst="rect">
             <a:avLst/>
@@ -8136,7 +8136,7 @@
                 <a:ea typeface="Pretendard"/>
                 <a:cs typeface="Pretendard"/>
               </a:rPr>
-              <a:t>GROUP BY user_id</a:t>
+              <a:t>1위 user_id 12844 · buys 6 · spend 44700</a:t>
             </a:r>
           </a:p>
         </p:txBody>
@@ -8150,7 +8150,7 @@
         <p:spPr>
           <a:xfrm>
             <a:off x="1143000" y="4076700"/>
-            <a:ext cx="1383387" cy="571500"/>
+            <a:ext cx="1325344" cy="571500"/>
           </a:xfrm>
           <a:prstGeom prst="rect">
             <a:avLst/>
@@ -8180,7 +8180,7 @@
         <p:spPr>
           <a:xfrm>
             <a:off x="1143000" y="4076700"/>
-            <a:ext cx="1383387" cy="571500"/>
+            <a:ext cx="1325344" cy="571500"/>
           </a:xfrm>
           <a:prstGeom prst="rect">
             <a:avLst/>
@@ -8207,7 +8207,7 @@
                 <a:ea typeface="Pretendard"/>
                 <a:cs typeface="Pretendard"/>
               </a:rPr>
-              <a:t>정렬</a:t>
+              <a:t>2단계 질의</a:t>
             </a:r>
           </a:p>
         </p:txBody>
@@ -8220,8 +8220,8 @@
         </p:nvSpPr>
         <p:spPr>
           <a:xfrm>
-            <a:off x="2526387" y="4076700"/>
-            <a:ext cx="14618613" cy="571500"/>
+            <a:off x="2468344" y="4076700"/>
+            <a:ext cx="14676656" cy="571500"/>
           </a:xfrm>
           <a:prstGeom prst="rect">
             <a:avLst/>
@@ -8252,8 +8252,8 @@
         </p:nvSpPr>
         <p:spPr>
           <a:xfrm>
-            <a:off x="2678787" y="4076700"/>
-            <a:ext cx="14313813" cy="571500"/>
+            <a:off x="2620744" y="4076700"/>
+            <a:ext cx="14371856" cy="571500"/>
           </a:xfrm>
           <a:prstGeom prst="rect">
             <a:avLst/>
@@ -8280,7 +8280,7 @@
                 <a:ea typeface="Pretendard"/>
                 <a:cs typeface="Pretendard"/>
               </a:rPr>
-              <a:t>ORDER BY spend DESC LIMIT 5</a:t>
+              <a:t>'orders_step1.parquet' AS o JOIN 'customers.csv' AS c ON customer_id</a:t>
             </a:r>
           </a:p>
         </p:txBody>
@@ -8294,7 +8294,7 @@
         <p:spPr>
           <a:xfrm>
             <a:off x="1143000" y="4724400"/>
-            <a:ext cx="1383387" cy="571500"/>
+            <a:ext cx="1325344" cy="571500"/>
           </a:xfrm>
           <a:prstGeom prst="rect">
             <a:avLst/>
@@ -8324,7 +8324,7 @@
         <p:spPr>
           <a:xfrm>
             <a:off x="1143000" y="4724400"/>
-            <a:ext cx="1383387" cy="571500"/>
+            <a:ext cx="1325344" cy="571500"/>
           </a:xfrm>
           <a:prstGeom prst="rect">
             <a:avLst/>
@@ -8351,7 +8351,7 @@
                 <a:ea typeface="Pretendard"/>
                 <a:cs typeface="Pretendard"/>
               </a:rPr>
-              <a:t>파일 JOIN</a:t>
+              <a:t>2단계 확인</a:t>
             </a:r>
           </a:p>
         </p:txBody>
@@ -8364,8 +8364,8 @@
         </p:nvSpPr>
         <p:spPr>
           <a:xfrm>
-            <a:off x="2526387" y="4724400"/>
-            <a:ext cx="14618613" cy="571500"/>
+            <a:off x="2468344" y="4724400"/>
+            <a:ext cx="14676656" cy="571500"/>
           </a:xfrm>
           <a:prstGeom prst="rect">
             <a:avLst/>
@@ -8396,8 +8396,8 @@
         </p:nvSpPr>
         <p:spPr>
           <a:xfrm>
-            <a:off x="2678787" y="4724400"/>
-            <a:ext cx="14313813" cy="571500"/>
+            <a:off x="2620744" y="4724400"/>
+            <a:ext cx="14371856" cy="571500"/>
           </a:xfrm>
           <a:prstGeom prst="rect">
             <a:avLst/>
@@ -8424,7 +8424,7 @@
                 <a:ea typeface="Pretendard"/>
                 <a:cs typeface="Pretendard"/>
               </a:rPr>
-              <a:t>FROM 'orders_step1.parquet' AS o JOIN 'customers.csv' AS c</a:t>
+              <a:t>부산 276 · 77389000 / 경기 254 · 72923000</a:t>
             </a:r>
           </a:p>
         </p:txBody>
@@ -8438,7 +8438,7 @@
         <p:spPr>
           <a:xfrm>
             <a:off x="1143000" y="5372100"/>
-            <a:ext cx="1383387" cy="571500"/>
+            <a:ext cx="1325344" cy="571500"/>
           </a:xfrm>
           <a:prstGeom prst="rect">
             <a:avLst/>
@@ -8468,7 +8468,7 @@
         <p:spPr>
           <a:xfrm>
             <a:off x="1143000" y="5372100"/>
-            <a:ext cx="1383387" cy="571500"/>
+            <a:ext cx="1325344" cy="571500"/>
           </a:xfrm>
           <a:prstGeom prst="rect">
             <a:avLst/>
@@ -8495,7 +8495,7 @@
                 <a:ea typeface="Pretendard"/>
                 <a:cs typeface="Pretendard"/>
               </a:rPr>
-              <a:t>잇는 키</a:t>
+              <a:t/>
             </a:r>
           </a:p>
         </p:txBody>
@@ -8508,8 +8508,8 @@
         </p:nvSpPr>
         <p:spPr>
           <a:xfrm>
-            <a:off x="2526387" y="5372100"/>
-            <a:ext cx="14618613" cy="571500"/>
+            <a:off x="2468344" y="5372100"/>
+            <a:ext cx="14676656" cy="571500"/>
           </a:xfrm>
           <a:prstGeom prst="rect">
             <a:avLst/>
@@ -8540,8 +8540,8 @@
         </p:nvSpPr>
         <p:spPr>
           <a:xfrm>
-            <a:off x="2678787" y="5372100"/>
-            <a:ext cx="14313813" cy="571500"/>
+            <a:off x="2620744" y="5372100"/>
+            <a:ext cx="14371856" cy="571500"/>
           </a:xfrm>
           <a:prstGeom prst="rect">
             <a:avLst/>
@@ -8568,27 +8568,68 @@
                 <a:ea typeface="Pretendard"/>
                 <a:cs typeface="Pretendard"/>
               </a:rPr>
-              <a:t>ON o.customer_id = c.customer_id</a:t>
-            </a:r>
-          </a:p>
-        </p:txBody>
-      </p:sp>
-      <p:sp>
-        <p:nvSpPr>
-          <p:cNvPr id="28" name="Rectangle 27"/>
-          <p:cNvSpPr/>
-          <p:nvPr/>
-        </p:nvSpPr>
-        <p:spPr>
-          <a:xfrm>
-            <a:off x="1143000" y="6019800"/>
-            <a:ext cx="1383387" cy="571500"/>
-          </a:xfrm>
-          <a:prstGeom prst="rect">
-            <a:avLst/>
-          </a:prstGeom>
-          <a:solidFill>
-            <a:srgbClr val="0D2B5E"/>
+              <a:t>서울 235 · 69007000 / 광주 250 · 68667000</a:t>
+            </a:r>
+          </a:p>
+        </p:txBody>
+      </p:sp>
+      <p:sp>
+        <p:nvSpPr>
+          <p:cNvPr id="28" name="TextBox 27"/>
+          <p:cNvSpPr txBox="1"/>
+          <p:nvPr/>
+        </p:nvSpPr>
+        <p:spPr>
+          <a:xfrm>
+            <a:off x="1143000" y="7620000"/>
+            <a:ext cx="16002000" cy="342900"/>
+          </a:xfrm>
+          <a:prstGeom prst="rect">
+            <a:avLst/>
+          </a:prstGeom>
+          <a:noFill/>
+        </p:spPr>
+        <p:txBody>
+          <a:bodyPr wrap="square" lIns="0" rIns="0" tIns="0" bIns="0" anchor="t">
+            <a:spAutoFit/>
+          </a:bodyPr>
+          <a:lstStyle/>
+          <a:p>
+            <a:pPr algn="l">
+              <a:lnSpc>
+                <a:spcPct val="100000"/>
+              </a:lnSpc>
+            </a:pPr>
+            <a:r>
+              <a:rPr sz="1875" b="1">
+                <a:solidFill>
+                  <a:srgbClr val="7D7D7D"/>
+                </a:solidFill>
+                <a:latin typeface="Pretendard"/>
+                <a:ea typeface="Pretendard"/>
+                <a:cs typeface="Pretendard"/>
+              </a:rPr>
+              <a:t>price 결측 30건은 price * quantity 가 NULL — sum 은 건너뛰고 count(*) 는 센다</a:t>
+            </a:r>
+          </a:p>
+        </p:txBody>
+      </p:sp>
+      <p:sp>
+        <p:nvSpPr>
+          <p:cNvPr id="29" name="Rectangle 28"/>
+          <p:cNvSpPr/>
+          <p:nvPr/>
+        </p:nvSpPr>
+        <p:spPr>
+          <a:xfrm>
+            <a:off x="1143000" y="8058150"/>
+            <a:ext cx="16002000" cy="9525"/>
+          </a:xfrm>
+          <a:prstGeom prst="rect">
+            <a:avLst/>
+          </a:prstGeom>
+          <a:solidFill>
+            <a:srgbClr val="DCE1E8"/>
           </a:solidFill>
           <a:ln>
             <a:noFill/>
@@ -8605,192 +8646,7 @@
       </p:sp>
       <p:sp>
         <p:nvSpPr>
-          <p:cNvPr id="29" name="TextBox 28"/>
-          <p:cNvSpPr txBox="1"/>
-          <p:nvPr/>
-        </p:nvSpPr>
-        <p:spPr>
-          <a:xfrm>
-            <a:off x="1143000" y="6019800"/>
-            <a:ext cx="1383387" cy="571500"/>
-          </a:xfrm>
-          <a:prstGeom prst="rect">
-            <a:avLst/>
-          </a:prstGeom>
-          <a:noFill/>
-        </p:spPr>
-        <p:txBody>
-          <a:bodyPr wrap="square" lIns="0" rIns="0" tIns="0" bIns="0" anchor="ctr">
-            <a:spAutoFit/>
-          </a:bodyPr>
-          <a:lstStyle/>
-          <a:p>
-            <a:pPr algn="ctr">
-              <a:lnSpc>
-                <a:spcPct val="100000"/>
-              </a:lnSpc>
-            </a:pPr>
-            <a:r>
-              <a:rPr sz="1800" b="1">
-                <a:solidFill>
-                  <a:srgbClr val="FFFFFF"/>
-                </a:solidFill>
-                <a:latin typeface="Pretendard"/>
-                <a:ea typeface="Pretendard"/>
-                <a:cs typeface="Pretendard"/>
-              </a:rPr>
-              <a:t>지역별 매출</a:t>
-            </a:r>
-          </a:p>
-        </p:txBody>
-      </p:sp>
-      <p:sp>
-        <p:nvSpPr>
-          <p:cNvPr id="30" name="Rectangle 29"/>
-          <p:cNvSpPr/>
-          <p:nvPr/>
-        </p:nvSpPr>
-        <p:spPr>
-          <a:xfrm>
-            <a:off x="2526387" y="6019800"/>
-            <a:ext cx="14618613" cy="571500"/>
-          </a:xfrm>
-          <a:prstGeom prst="rect">
-            <a:avLst/>
-          </a:prstGeom>
-          <a:solidFill>
-            <a:srgbClr val="FAFBFD"/>
-          </a:solidFill>
-          <a:ln w="9525">
-            <a:solidFill>
-              <a:srgbClr val="DCE1E8"/>
-            </a:solidFill>
-          </a:ln>
-          <a:effectLst/>
-        </p:spPr>
-        <p:txBody>
-          <a:bodyPr rtlCol="0" anchor="ctr" wrap="square"/>
-          <a:lstStyle/>
-          <a:p>
-            <a:pPr algn="ctr"/>
-          </a:p>
-        </p:txBody>
-      </p:sp>
-      <p:sp>
-        <p:nvSpPr>
-          <p:cNvPr id="31" name="TextBox 30"/>
-          <p:cNvSpPr txBox="1"/>
-          <p:nvPr/>
-        </p:nvSpPr>
-        <p:spPr>
-          <a:xfrm>
-            <a:off x="2678787" y="6019800"/>
-            <a:ext cx="14313813" cy="571500"/>
-          </a:xfrm>
-          <a:prstGeom prst="rect">
-            <a:avLst/>
-          </a:prstGeom>
-          <a:noFill/>
-        </p:spPr>
-        <p:txBody>
-          <a:bodyPr wrap="square" lIns="0" rIns="0" tIns="0" bIns="0" anchor="ctr">
-            <a:spAutoFit/>
-          </a:bodyPr>
-          <a:lstStyle/>
-          <a:p>
-            <a:pPr algn="l">
-              <a:lnSpc>
-                <a:spcPct val="115000"/>
-              </a:lnSpc>
-            </a:pPr>
-            <a:r>
-              <a:rPr sz="1800" b="0">
-                <a:solidFill>
-                  <a:srgbClr val="3D3D3D"/>
-                </a:solidFill>
-                <a:latin typeface="Pretendard"/>
-                <a:ea typeface="Pretendard"/>
-                <a:cs typeface="Pretendard"/>
-              </a:rPr>
-              <a:t>sum(o.price * o.quantity) AS total … GROUP BY c.region</a:t>
-            </a:r>
-          </a:p>
-        </p:txBody>
-      </p:sp>
-      <p:sp>
-        <p:nvSpPr>
-          <p:cNvPr id="32" name="TextBox 31"/>
-          <p:cNvSpPr txBox="1"/>
-          <p:nvPr/>
-        </p:nvSpPr>
-        <p:spPr>
-          <a:xfrm>
-            <a:off x="1143000" y="7620000"/>
-            <a:ext cx="16002000" cy="342900"/>
-          </a:xfrm>
-          <a:prstGeom prst="rect">
-            <a:avLst/>
-          </a:prstGeom>
-          <a:noFill/>
-        </p:spPr>
-        <p:txBody>
-          <a:bodyPr wrap="square" lIns="0" rIns="0" tIns="0" bIns="0" anchor="t">
-            <a:spAutoFit/>
-          </a:bodyPr>
-          <a:lstStyle/>
-          <a:p>
-            <a:pPr algn="l">
-              <a:lnSpc>
-                <a:spcPct val="100000"/>
-              </a:lnSpc>
-            </a:pPr>
-            <a:r>
-              <a:rPr sz="1875" b="1">
-                <a:solidFill>
-                  <a:srgbClr val="7D7D7D"/>
-                </a:solidFill>
-                <a:latin typeface="Pretendard"/>
-                <a:ea typeface="Pretendard"/>
-                <a:cs typeface="Pretendard"/>
-              </a:rPr>
-              <a:t>확인: 1단계는 5행이 spend 내림차순 · 2단계는 지역 4행 — price 결측 30건은 SQL 의 sum 도 건너뛴다</a:t>
-            </a:r>
-          </a:p>
-        </p:txBody>
-      </p:sp>
-      <p:sp>
-        <p:nvSpPr>
-          <p:cNvPr id="33" name="Rectangle 32"/>
-          <p:cNvSpPr/>
-          <p:nvPr/>
-        </p:nvSpPr>
-        <p:spPr>
-          <a:xfrm>
-            <a:off x="1143000" y="8058150"/>
-            <a:ext cx="16002000" cy="9525"/>
-          </a:xfrm>
-          <a:prstGeom prst="rect">
-            <a:avLst/>
-          </a:prstGeom>
-          <a:solidFill>
-            <a:srgbClr val="DCE1E8"/>
-          </a:solidFill>
-          <a:ln>
-            <a:noFill/>
-          </a:ln>
-          <a:effectLst/>
-        </p:spPr>
-        <p:txBody>
-          <a:bodyPr rtlCol="0" anchor="ctr" wrap="square"/>
-          <a:lstStyle/>
-          <a:p>
-            <a:pPr algn="ctr"/>
-          </a:p>
-        </p:txBody>
-      </p:sp>
-      <p:sp>
-        <p:nvSpPr>
-          <p:cNvPr id="34" name="TextBox 33"/>
+          <p:cNvPr id="30" name="TextBox 29"/>
           <p:cNvSpPr txBox="1"/>
           <p:nvPr/>
         </p:nvSpPr>
@@ -8831,7 +8687,7 @@
       </p:sp>
       <p:sp>
         <p:nvSpPr>
-          <p:cNvPr id="35" name="TextBox 34"/>
+          <p:cNvPr id="31" name="TextBox 30"/>
           <p:cNvSpPr txBox="1"/>
           <p:nvPr/>
         </p:nvSpPr>
@@ -8890,7 +8746,7 @@
       <p:grpSpPr/>
       <p:sp>
         <p:nvSpPr>
-          <p:cNvPr id="2" name="Oval 1"/>
+          <p:cNvPr id="2" name="deckgen:decor"/>
           <p:cNvSpPr/>
           <p:nvPr/>
         </p:nvSpPr>
@@ -8920,7 +8776,7 @@
       </p:sp>
       <p:sp>
         <p:nvSpPr>
-          <p:cNvPr id="3" name="Oval 2"/>
+          <p:cNvPr id="3" name="deckgen:decor"/>
           <p:cNvSpPr/>
           <p:nvPr/>
         </p:nvSpPr>
@@ -8950,7 +8806,7 @@
       </p:sp>
       <p:sp>
         <p:nvSpPr>
-          <p:cNvPr id="4" name="Oval 3"/>
+          <p:cNvPr id="4" name="deckgen:decor"/>
           <p:cNvSpPr/>
           <p:nvPr/>
         </p:nvSpPr>
@@ -9055,7 +8911,7 @@
                 <a:ea typeface="Pretendard"/>
                 <a:cs typeface="Pretendard"/>
               </a:rPr>
-              <a:t>3단계 — Pandas 답과 diff 를 뺀다</a:t>
+              <a:t>3단계 — Pandas 로 같은 질문, diff 를 뺀다</a:t>
             </a:r>
           </a:p>
         </p:txBody>
@@ -9231,7 +9087,7 @@
                 <a:ea typeface="Pretendard"/>
                 <a:cs typeface="Pretendard"/>
               </a:rPr>
-              <a:t>Pandas 로 같은 질문</a:t>
+              <a:t>SQL 이 아니라 Pandas 로</a:t>
             </a:r>
           </a:p>
         </p:txBody>
@@ -9272,7 +9128,7 @@
                 <a:ea typeface="Pretendard"/>
                 <a:cs typeface="Pretendard"/>
               </a:rPr>
-              <a:t>orders_enriched.parquet 를 groupby('region') 으로 orders·total</a:t>
+              <a:t>orders_enriched.parquet 를 groupby('region') — orders·total(amount 합)</a:t>
             </a:r>
           </a:p>
         </p:txBody>
@@ -9459,7 +9315,7 @@
                 <a:ea typeface="Pretendard"/>
                 <a:cs typeface="Pretendard"/>
               </a:rPr>
-              <a:t>suffixes=('_sql', '_pd') 로 붙이고 diff = total_sql - total_pd</a:t>
+              <a:t>sql_result(2단계) 와 suffixes=('_sql', '_pd') · diff = total_sql - total_pd</a:t>
             </a:r>
           </a:p>
         </p:txBody>
@@ -9605,7 +9461,7 @@
                 <a:ea typeface="Pretendard"/>
                 <a:cs typeface="Pretendard"/>
               </a:rPr>
-              <a:t>diff 가 전부 0 이면</a:t>
+              <a:t>diff 가 네 지역 모두 0.0</a:t>
             </a:r>
           </a:p>
         </p:txBody>
@@ -9646,7 +9502,7 @@
                 <a:ea typeface="Pretendard"/>
                 <a:cs typeface="Pretendard"/>
               </a:rPr>
-              <a:t>두 도구의 답이 같다 — 0 이 아니면 결측을 다루는 시점을 의심</a:t>
+              <a:t>amount 와 price * quantity 가 결측을 똑같이 건너뛰었다</a:t>
             </a:r>
           </a:p>
         </p:txBody>
@@ -9833,7 +9689,7 @@
                 <a:ea typeface="Pretendard"/>
                 <a:cs typeface="Pretendard"/>
               </a:rPr>
-              <a:t>3-5 에서 Pandas 를 DuckDB 로 옮길 때 결과가 안 바뀌었는지 확인하는 유일한 방법</a:t>
+              <a:t>0 이 아니면 어느 쪽이 결측을 다르게 다뤘는지부터 — 3-5 에서 도구를 옮길 때 쓰는 방법</a:t>
             </a:r>
           </a:p>
         </p:txBody>
@@ -9970,7 +9826,7 @@
       <p:grpSpPr/>
       <p:sp>
         <p:nvSpPr>
-          <p:cNvPr id="2" name="Oval 1"/>
+          <p:cNvPr id="2" name="deckgen:decor"/>
           <p:cNvSpPr/>
           <p:nvPr/>
         </p:nvSpPr>
@@ -10000,7 +9856,7 @@
       </p:sp>
       <p:sp>
         <p:nvSpPr>
-          <p:cNvPr id="3" name="Oval 2"/>
+          <p:cNvPr id="3" name="deckgen:decor"/>
           <p:cNvSpPr/>
           <p:nvPr/>
         </p:nvSpPr>
@@ -10030,7 +9886,7 @@
       </p:sp>
       <p:sp>
         <p:nvSpPr>
-          <p:cNvPr id="4" name="Oval 3"/>
+          <p:cNvPr id="4" name="deckgen:decor"/>
           <p:cNvSpPr/>
           <p:nvPr/>
         </p:nvSpPr>
@@ -10247,7 +10103,7 @@
                 <a:ea typeface="Pretendard"/>
                 <a:cs typeface="Pretendard"/>
               </a:rPr>
-              <a:t>daily 를 만들고 sum(revenue) OVER (ORDER BY d)</a:t>
+              <a:t>6월 1일 4064300 부터 단조 증가</a:t>
             </a:r>
           </a:p>
         </p:txBody>
@@ -10704,7 +10560,7 @@
                 <a:ea typeface="Pretendard"/>
                 <a:cs typeface="Pretendard"/>
               </a:rPr>
-              <a:t>확인</a:t>
+              <a:t>CTE 따로</a:t>
             </a:r>
           </a:p>
         </p:txBody>
@@ -10779,7 +10635,7 @@
                 <a:ea typeface="Pretendard"/>
                 <a:cs typeface="Pretendard"/>
               </a:rPr>
-              <a:t>단조 증가</a:t>
+              <a:t>daily 만 3행</a:t>
             </a:r>
           </a:p>
         </p:txBody>
@@ -10861,7 +10717,7 @@
                 <a:ea typeface="Pretendard"/>
                 <a:cs typeface="Pretendard"/>
               </a:rPr>
-              <a:t>by_customer 위에 rank() 와 QUALIFY rnk &lt;= 3</a:t>
+              <a:t>12행 — 서울 1위 고객 19 · 4452000</a:t>
             </a:r>
           </a:p>
         </p:txBody>
@@ -11601,7 +11457,7 @@
       <p:grpSpPr/>
       <p:sp>
         <p:nvSpPr>
-          <p:cNvPr id="2" name="Oval 1"/>
+          <p:cNvPr id="2" name="deckgen:decor"/>
           <p:cNvSpPr/>
           <p:nvPr/>
         </p:nvSpPr>
@@ -11631,7 +11487,7 @@
       </p:sp>
       <p:sp>
         <p:nvSpPr>
-          <p:cNvPr id="3" name="Oval 2"/>
+          <p:cNvPr id="3" name="deckgen:decor"/>
           <p:cNvSpPr/>
           <p:nvPr/>
         </p:nvSpPr>
@@ -11661,7 +11517,7 @@
       </p:sp>
       <p:sp>
         <p:nvSpPr>
-          <p:cNvPr id="4" name="Oval 3"/>
+          <p:cNvPr id="4" name="deckgen:decor"/>
           <p:cNvSpPr/>
           <p:nvPr/>
         </p:nvSpPr>
@@ -11766,7 +11622,7 @@
                 <a:ea typeface="Pretendard"/>
                 <a:cs typeface="Pretendard"/>
               </a:rPr>
-              <a:t>WHERE 에 윈도 별칭을 써 본다 — Binder Error</a:t>
+              <a:t>윈도 함수를 WHERE 로 거르면 — Binder Error</a:t>
             </a:r>
           </a:p>
         </p:txBody>
@@ -11878,7 +11734,7 @@
                 <a:ea typeface="Pretendard"/>
                 <a:cs typeface="Pretendard"/>
               </a:rPr>
-              <a:t>별칭 rnk 를 찾지 못한다는 Binder Error</a:t>
+              <a:t>WHERE clause cannot contain window functions!</a:t>
             </a:r>
           </a:p>
         </p:txBody>
@@ -11983,7 +11839,7 @@
                 <a:ea typeface="Pretendard"/>
                 <a:cs typeface="Pretendard"/>
               </a:rPr>
-              <a:t>SQL 은 WHERE 를 SELECT 보다 먼저 평가한다</a:t>
+              <a:t>WHERE 는 윈도 함수 계산 전에 행을 거른다</a:t>
             </a:r>
           </a:p>
         </p:txBody>
@@ -12054,7 +11910,7 @@
                 <a:ea typeface="Pretendard"/>
                 <a:cs typeface="Pretendard"/>
               </a:rPr>
-              <a:t>SELECT 에서 지은 rnk 를 WHERE 가 모른다</a:t>
+              <a:t>별칭은 보통 받아 주지만 윈도 함수만은 안 된다</a:t>
             </a:r>
           </a:p>
         </p:txBody>
@@ -12125,7 +11981,7 @@
                 <a:ea typeface="Pretendard"/>
                 <a:cs typeface="Pretendard"/>
               </a:rPr>
-              <a:t>2-2 에서 CTE 로 감쌌던 바로 그 이유</a:t>
+              <a:t>try 로 감싸 두어 파일은 멈추지 않는다</a:t>
             </a:r>
           </a:p>
         </p:txBody>
@@ -12207,7 +12063,7 @@
                 <a:ea typeface="Pretendard"/>
                 <a:cs typeface="Pretendard"/>
               </a:rPr>
-              <a:t>윈도 결과는 QUALIFY, 어디서나는 CTE</a:t>
+              <a:t>두 표가 똑같이 12행(지역 4 × 3명)</a:t>
             </a:r>
           </a:p>
         </p:txBody>
@@ -12454,7 +12310,7 @@
                 <a:ea typeface="Pretendard"/>
                 <a:cs typeface="Pretendard"/>
               </a:rPr>
-              <a:t>앞 결과와 같다 — 동률이면 3명을 넘을 수 있다</a:t>
+              <a:t>동률이 있으면 3명을 넘을 수 있다</a:t>
             </a:r>
           </a:p>
         </p:txBody>
@@ -12662,7 +12518,7 @@
       <p:grpSpPr/>
       <p:sp>
         <p:nvSpPr>
-          <p:cNvPr id="2" name="Oval 1"/>
+          <p:cNvPr id="2" name="deckgen:decor"/>
           <p:cNvSpPr/>
           <p:nvPr/>
         </p:nvSpPr>
@@ -12692,7 +12548,7 @@
       </p:sp>
       <p:sp>
         <p:nvSpPr>
-          <p:cNvPr id="3" name="Oval 2"/>
+          <p:cNvPr id="3" name="deckgen:decor"/>
           <p:cNvSpPr/>
           <p:nvPr/>
         </p:nvSpPr>
@@ -12722,7 +12578,7 @@
       </p:sp>
       <p:sp>
         <p:nvSpPr>
-          <p:cNvPr id="4" name="Oval 3"/>
+          <p:cNvPr id="4" name="deckgen:decor"/>
           <p:cNvSpPr/>
           <p:nvPr/>
         </p:nvSpPr>
@@ -12827,7 +12683,7 @@
                 <a:ea typeface="Pretendard"/>
                 <a:cs typeface="Pretendard"/>
               </a:rPr>
-              <a:t>같은 이동 평균인데 — 앞쪽 6일이 다르다</a:t>
+              <a:t>3-2 의 rolling(7) 을 SQL 로 — 앞쪽이 다름</a:t>
             </a:r>
           </a:p>
         </p:txBody>
@@ -12939,7 +12795,7 @@
                 <a:ea typeface="Pretendard"/>
                 <a:cs typeface="Pretendard"/>
               </a:rPr>
-              <a:t>창이 안 차면 NaN — 앞 6일이 비어 있다</a:t>
+              <a:t>창이 안 차면 NaN — 3-2 는 주문 데이터</a:t>
             </a:r>
           </a:p>
         </p:txBody>
@@ -13186,7 +13042,7 @@
                 <a:ea typeface="Pretendard"/>
                 <a:cs typeface="Pretendard"/>
               </a:rPr>
-              <a:t>3-2 에서 본 그 결과</a:t>
+              <a:t>오늘 데이터(이벤트)와는 다르다</a:t>
             </a:r>
           </a:p>
         </p:txBody>
@@ -13227,7 +13083,7 @@
                 <a:ea typeface="Pretendard"/>
                 <a:cs typeface="Pretendard"/>
               </a:rPr>
-              <a:t>SQL 윈도 프레임</a:t>
+              <a:t>SQL 윈도 프레임 — 오늘</a:t>
             </a:r>
           </a:p>
         </p:txBody>
@@ -13444,7 +13300,7 @@
                 <a:ea typeface="Pretendard"/>
                 <a:cs typeface="Pretendard"/>
               </a:rPr>
-              <a:t>앞쪽 며칠은 그날까지의 평균</a:t>
+              <a:t>첫 줄 ma7 4064300.0 · 둘째 4186050.0</a:t>
             </a:r>
           </a:p>
         </p:txBody>
@@ -13723,7 +13579,7 @@
       <p:grpSpPr/>
       <p:sp>
         <p:nvSpPr>
-          <p:cNvPr id="2" name="Oval 1"/>
+          <p:cNvPr id="2" name="deckgen:decor"/>
           <p:cNvSpPr/>
           <p:nvPr/>
         </p:nvSpPr>
@@ -13753,7 +13609,7 @@
       </p:sp>
       <p:sp>
         <p:nvSpPr>
-          <p:cNvPr id="3" name="Oval 2"/>
+          <p:cNvPr id="3" name="deckgen:decor"/>
           <p:cNvSpPr/>
           <p:nvPr/>
         </p:nvSpPr>
@@ -13783,7 +13639,7 @@
       </p:sp>
       <p:sp>
         <p:nvSpPr>
-          <p:cNvPr id="4" name="Oval 3"/>
+          <p:cNvPr id="4" name="deckgen:decor"/>
           <p:cNvSpPr/>
           <p:nvPr/>
         </p:nvSpPr>
@@ -14115,7 +13971,7 @@
                 <a:ea typeface="Pretendard"/>
                 <a:cs typeface="Pretendard"/>
               </a:rPr>
-              <a:t>date_trunc('day', ts) 로 묶은 SELECT 만 LIMIT 3 — 3행이 나오면 통과</a:t>
+              <a:t>CTE 안의 SELECT 만 LIMIT 3 — 6월 1~3일 3행이면 통과</a:t>
             </a:r>
           </a:p>
         </p:txBody>
@@ -14291,7 +14147,7 @@
                 <a:ea typeface="Pretendard"/>
                 <a:cs typeface="Pretendard"/>
               </a:rPr>
-              <a:t>어느 단계에서 틀어졌는지</a:t>
+              <a:t>GROUP BY ALL</a:t>
             </a:r>
           </a:p>
           <a:p>
@@ -14312,7 +14168,7 @@
                 <a:ea typeface="Pretendard"/>
                 <a:cs typeface="Pretendard"/>
               </a:rPr>
-              <a:t>긴 질의가 이상하면 CTE 를 하나씩 떼어 확인한다 — 바로 보인다</a:t>
+              <a:t>집계가 아닌 열로 알아서 묶는다 — 6월 1일 buy 818 · cart 2540 · view 13389</a:t>
             </a:r>
           </a:p>
         </p:txBody>
@@ -14488,7 +14344,7 @@
                 <a:ea typeface="Pretendard"/>
                 <a:cs typeface="Pretendard"/>
               </a:rPr>
-              <a:t>GROUP BY ALL</a:t>
+              <a:t>SELECT * EXCLUDE (event_id)</a:t>
             </a:r>
           </a:p>
           <a:p>
@@ -14509,7 +14365,7 @@
                 <a:ea typeface="Pretendard"/>
                 <a:cs typeface="Pretendard"/>
               </a:rPr>
-              <a:t>집계가 아닌 열로 알아서 묶는다 — 다른 DB 로 옮길 때는 풀어 쓴다</a:t>
+              <a:t>몇 개만 빼고 전부 — 4열 3행</a:t>
             </a:r>
           </a:p>
         </p:txBody>
@@ -14685,7 +14541,7 @@
                 <a:ea typeface="Pretendard"/>
                 <a:cs typeface="Pretendard"/>
               </a:rPr>
-              <a:t>EXCLUDE · COLUMNS</a:t>
+              <a:t>max(COLUMNS('^value$'))</a:t>
             </a:r>
           </a:p>
           <a:p>
@@ -14706,7 +14562,7 @@
                 <a:ea typeface="Pretendard"/>
                 <a:cs typeface="Pretendard"/>
               </a:rPr>
-              <a:t>SELECT * EXCLUDE (event_id) 몇 개만 빼고 전부 · max(COLUMNS('^value$')) 패턴 집계</a:t>
+              <a:t>열 이름 패턴으로 집계 — 9900</a:t>
             </a:r>
           </a:p>
         </p:txBody>
@@ -14777,7 +14633,7 @@
                 <a:ea typeface="Pretendard"/>
                 <a:cs typeface="Pretendard"/>
               </a:rPr>
-              <a:t>「같은 분석인데 숫자가 다르다」의 원인은 6단계 같은 미묘한 차이 — 파이프라인을 옮길 때 반드시 확인</a:t>
+              <a:t>GROUP BY ALL 은 다른 DB 로 옮길 때 풀어 써야 한다</a:t>
             </a:r>
           </a:p>
         </p:txBody>
